--- a/test-corpus/word-verification/tree-view.pptx
+++ b/test-corpus/word-verification/tree-view.pptx
@@ -144,7 +144,7 @@
         </p:nvSpPr>
         <p:spPr>
           <a:xfrm>
-            <a:off x="4157862" y="1768570"/>
+            <a:off x="2036454" y="1768570"/>
             <a:ext cx="32168" cy="3216826"/>
           </a:xfrm>
           <a:prstGeom prst="rect">
@@ -166,7 +166,7 @@
         </p:nvSpPr>
         <p:spPr>
           <a:xfrm>
-            <a:off x="3997021" y="1446887"/>
+            <a:off x="1875613" y="1446887"/>
             <a:ext cx="1544077" cy="353851"/>
           </a:xfrm>
           <a:prstGeom prst="rect">
@@ -208,7 +208,7 @@
         </p:nvSpPr>
         <p:spPr>
           <a:xfrm>
-            <a:off x="4157862" y="2025916"/>
+            <a:off x="2036454" y="2025916"/>
             <a:ext cx="193010" cy="32168"/>
           </a:xfrm>
           <a:prstGeom prst="rect">
@@ -230,7 +230,7 @@
         </p:nvSpPr>
         <p:spPr>
           <a:xfrm>
-            <a:off x="4576050" y="2186757"/>
+            <a:off x="2454642" y="2186757"/>
             <a:ext cx="32168" cy="1962264"/>
           </a:xfrm>
           <a:prstGeom prst="rect">
@@ -252,7 +252,7 @@
         </p:nvSpPr>
         <p:spPr>
           <a:xfrm>
-            <a:off x="4415208" y="1865075"/>
+            <a:off x="2293800" y="1865075"/>
             <a:ext cx="997216" cy="353851"/>
           </a:xfrm>
           <a:prstGeom prst="rect">
@@ -294,7 +294,7 @@
         </p:nvSpPr>
         <p:spPr>
           <a:xfrm>
-            <a:off x="5412424" y="1865075"/>
+            <a:off x="3291016" y="1865075"/>
             <a:ext cx="1334983" cy="353851"/>
           </a:xfrm>
           <a:prstGeom prst="rect">
@@ -336,7 +336,7 @@
         </p:nvSpPr>
         <p:spPr>
           <a:xfrm>
-            <a:off x="4576050" y="2444104"/>
+            <a:off x="2454642" y="2444104"/>
             <a:ext cx="193010" cy="32168"/>
           </a:xfrm>
           <a:prstGeom prst="rect">
@@ -358,7 +358,7 @@
         </p:nvSpPr>
         <p:spPr>
           <a:xfrm>
-            <a:off x="4994237" y="2604945"/>
+            <a:off x="2872829" y="2604945"/>
             <a:ext cx="32168" cy="1125889"/>
           </a:xfrm>
           <a:prstGeom prst="rect">
@@ -380,7 +380,7 @@
         </p:nvSpPr>
         <p:spPr>
           <a:xfrm>
-            <a:off x="4833396" y="2283262"/>
+            <a:off x="2711988" y="2283262"/>
             <a:ext cx="868543" cy="353851"/>
           </a:xfrm>
           <a:prstGeom prst="rect">
@@ -422,7 +422,7 @@
         </p:nvSpPr>
         <p:spPr>
           <a:xfrm>
-            <a:off x="4994237" y="2862291"/>
+            <a:off x="2872829" y="2862291"/>
             <a:ext cx="193010" cy="32168"/>
           </a:xfrm>
           <a:prstGeom prst="rect">
@@ -444,7 +444,7 @@
         </p:nvSpPr>
         <p:spPr>
           <a:xfrm>
-            <a:off x="5251583" y="2701450"/>
+            <a:off x="3130175" y="2701450"/>
             <a:ext cx="1270646" cy="353851"/>
           </a:xfrm>
           <a:prstGeom prst="rect">
@@ -486,7 +486,7 @@
         </p:nvSpPr>
         <p:spPr>
           <a:xfrm>
-            <a:off x="4994237" y="3280478"/>
+            <a:off x="2872829" y="3280478"/>
             <a:ext cx="193010" cy="32168"/>
           </a:xfrm>
           <a:prstGeom prst="rect">
@@ -508,7 +508,7 @@
         </p:nvSpPr>
         <p:spPr>
           <a:xfrm>
-            <a:off x="5251583" y="3119637"/>
+            <a:off x="3130175" y="3119637"/>
             <a:ext cx="1817507" cy="353851"/>
           </a:xfrm>
           <a:prstGeom prst="rect">
@@ -550,7 +550,7 @@
         </p:nvSpPr>
         <p:spPr>
           <a:xfrm>
-            <a:off x="4994237" y="3698666"/>
+            <a:off x="2872829" y="3698666"/>
             <a:ext cx="193010" cy="32168"/>
           </a:xfrm>
           <a:prstGeom prst="rect">
@@ -572,7 +572,7 @@
         </p:nvSpPr>
         <p:spPr>
           <a:xfrm>
-            <a:off x="5251583" y="3537825"/>
+            <a:off x="3130175" y="3537825"/>
             <a:ext cx="1415404" cy="353851"/>
           </a:xfrm>
           <a:prstGeom prst="rect">
@@ -618,7 +618,7 @@
         </p:nvSpPr>
         <p:spPr>
           <a:xfrm>
-            <a:off x="4576050" y="4116853"/>
+            <a:off x="2454642" y="4116853"/>
             <a:ext cx="193010" cy="32168"/>
           </a:xfrm>
           <a:prstGeom prst="rect">
@@ -640,7 +640,7 @@
         </p:nvSpPr>
         <p:spPr>
           <a:xfrm>
-            <a:off x="4833396" y="3956012"/>
+            <a:off x="2711988" y="3956012"/>
             <a:ext cx="1946180" cy="353851"/>
           </a:xfrm>
           <a:prstGeom prst="rect">
@@ -682,7 +682,7 @@
         </p:nvSpPr>
         <p:spPr>
           <a:xfrm>
-            <a:off x="4157862" y="4535041"/>
+            <a:off x="2036454" y="4535041"/>
             <a:ext cx="193010" cy="32168"/>
           </a:xfrm>
           <a:prstGeom prst="rect">
@@ -704,7 +704,7 @@
         </p:nvSpPr>
         <p:spPr>
           <a:xfrm>
-            <a:off x="4415208" y="4374199"/>
+            <a:off x="2293800" y="4374199"/>
             <a:ext cx="868543" cy="353851"/>
           </a:xfrm>
           <a:prstGeom prst="rect">
@@ -746,7 +746,7 @@
         </p:nvSpPr>
         <p:spPr>
           <a:xfrm>
-            <a:off x="4157862" y="4953228"/>
+            <a:off x="2036454" y="4953228"/>
             <a:ext cx="193010" cy="32168"/>
           </a:xfrm>
           <a:prstGeom prst="rect">
@@ -768,7 +768,7 @@
         </p:nvSpPr>
         <p:spPr>
           <a:xfrm>
-            <a:off x="4415208" y="4792387"/>
+            <a:off x="2293800" y="4792387"/>
             <a:ext cx="2283947" cy="353851"/>
           </a:xfrm>
           <a:prstGeom prst="rect">
@@ -810,7 +810,7 @@
         </p:nvSpPr>
         <p:spPr>
           <a:xfrm>
-            <a:off x="6699155" y="4792387"/>
+            <a:off x="4577747" y="4792387"/>
             <a:ext cx="1753170" cy="353851"/>
           </a:xfrm>
           <a:prstGeom prst="rect">
@@ -852,7 +852,7 @@
         </p:nvSpPr>
         <p:spPr>
           <a:xfrm>
-            <a:off x="4157862" y="5532257"/>
+            <a:off x="2036454" y="5532257"/>
             <a:ext cx="32168" cy="289514"/>
           </a:xfrm>
           <a:prstGeom prst="rect">
@@ -874,7 +874,7 @@
         </p:nvSpPr>
         <p:spPr>
           <a:xfrm>
-            <a:off x="3997021" y="5210574"/>
+            <a:off x="1875613" y="5210574"/>
             <a:ext cx="997216" cy="353851"/>
           </a:xfrm>
           <a:prstGeom prst="rect">
@@ -916,7 +916,7 @@
         </p:nvSpPr>
         <p:spPr>
           <a:xfrm>
-            <a:off x="4157862" y="5789603"/>
+            <a:off x="2036454" y="5789603"/>
             <a:ext cx="193010" cy="32168"/>
           </a:xfrm>
           <a:prstGeom prst="rect">
@@ -938,7 +938,7 @@
         </p:nvSpPr>
         <p:spPr>
           <a:xfrm>
-            <a:off x="4415208" y="5628762"/>
+            <a:off x="2293800" y="5628762"/>
             <a:ext cx="1141973" cy="353851"/>
           </a:xfrm>
           <a:prstGeom prst="rect">
@@ -968,6 +968,192 @@
                 </a:solidFill>
               </a:rPr>
               <a:t>specs/</a:t>
+            </a:r>
+          </a:p>
+        </p:txBody>
+      </p:sp>
+      <p:sp>
+        <p:nvSpPr>
+          <p:cNvPr id="4" name="Mermaid source"/>
+          <p:cNvSpPr/>
+          <p:nvPr/>
+        </p:nvSpPr>
+        <p:spPr>
+          <a:xfrm>
+            <a:off x="7674864" y="1028700"/>
+            <a:ext cx="4059936" cy="5372100"/>
+          </a:xfrm>
+          <a:prstGeom prst="rect">
+            <a:avLst/>
+          </a:prstGeom>
+          <a:solidFill>
+            <a:srgbClr val="F3F4F6"/>
+          </a:solidFill>
+          <a:ln w="9525">
+            <a:solidFill>
+              <a:srgbClr val="D1D5DB"/>
+            </a:solidFill>
+          </a:ln>
+        </p:spPr>
+        <p:txBody>
+          <a:bodyPr wrap="square" lIns="91440" tIns="45720" rIns="91440" bIns="45720" anchor="t">
+            <a:noAutofit/>
+          </a:bodyPr>
+          <a:lstStyle/>
+          <a:p>
+            <a:pPr algn="l"/>
+            <a:r>
+              <a:rPr lang="en-US" sz="1400" dirty="0">
+                <a:solidFill>
+                  <a:srgbClr val="1F2937"/>
+                </a:solidFill>
+                <a:latin typeface="Consolas"/>
+                <a:cs typeface="Consolas"/>
+              </a:rPr>
+              <a:t>treeView-beta</a:t>
+            </a:r>
+          </a:p>
+          <a:p>
+            <a:pPr algn="l"/>
+            <a:r>
+              <a:rPr lang="en-US" sz="1400" dirty="0">
+                <a:solidFill>
+                  <a:srgbClr val="1F2937"/>
+                </a:solidFill>
+                <a:latin typeface="Consolas"/>
+                <a:cs typeface="Consolas"/>
+              </a:rPr>
+              <a:t>    "packages/"</a:t>
+            </a:r>
+          </a:p>
+          <a:p>
+            <a:pPr algn="l"/>
+            <a:r>
+              <a:rPr lang="en-US" sz="1400" dirty="0">
+                <a:solidFill>
+                  <a:srgbClr val="1F2937"/>
+                </a:solidFill>
+                <a:latin typeface="Consolas"/>
+                <a:cs typeface="Consolas"/>
+              </a:rPr>
+              <a:t>        "core/" ## the moat</a:t>
+            </a:r>
+          </a:p>
+          <a:p>
+            <a:pPr algn="l"/>
+            <a:r>
+              <a:rPr lang="en-US" sz="1400" dirty="0">
+                <a:solidFill>
+                  <a:srgbClr val="1F2937"/>
+                </a:solidFill>
+                <a:latin typeface="Consolas"/>
+                <a:cs typeface="Consolas"/>
+              </a:rPr>
+              <a:t>            "src/"</a:t>
+            </a:r>
+          </a:p>
+          <a:p>
+            <a:pPr algn="l"/>
+            <a:r>
+              <a:rPr lang="en-US" sz="1400" dirty="0">
+                <a:solidFill>
+                  <a:srgbClr val="1F2937"/>
+                </a:solidFill>
+                <a:latin typeface="Consolas"/>
+                <a:cs typeface="Consolas"/>
+              </a:rPr>
+              <a:t>                parser/</a:t>
+            </a:r>
+          </a:p>
+          <a:p>
+            <a:pPr algn="l"/>
+            <a:r>
+              <a:rPr lang="en-US" sz="1400" dirty="0">
+                <a:solidFill>
+                  <a:srgbClr val="1F2937"/>
+                </a:solidFill>
+                <a:latin typeface="Consolas"/>
+                <a:cs typeface="Consolas"/>
+              </a:rPr>
+              <a:t>                translator/</a:t>
+            </a:r>
+          </a:p>
+          <a:p>
+            <a:pPr algn="l"/>
+            <a:r>
+              <a:rPr lang="en-US" sz="1400" dirty="0">
+                <a:solidFill>
+                  <a:srgbClr val="1F2937"/>
+                </a:solidFill>
+                <a:latin typeface="Consolas"/>
+                <a:cs typeface="Consolas"/>
+              </a:rPr>
+              <a:t>                index.ts:::highlight</a:t>
+            </a:r>
+          </a:p>
+          <a:p>
+            <a:pPr algn="l"/>
+            <a:r>
+              <a:rPr lang="en-US" sz="1400" dirty="0">
+                <a:solidFill>
+                  <a:srgbClr val="1F2937"/>
+                </a:solidFill>
+                <a:latin typeface="Consolas"/>
+                <a:cs typeface="Consolas"/>
+              </a:rPr>
+              <a:t>            package.json</a:t>
+            </a:r>
+          </a:p>
+          <a:p>
+            <a:pPr algn="l"/>
+            <a:r>
+              <a:rPr lang="en-US" sz="1400" dirty="0">
+                <a:solidFill>
+                  <a:srgbClr val="1F2937"/>
+                </a:solidFill>
+                <a:latin typeface="Consolas"/>
+                <a:cs typeface="Consolas"/>
+              </a:rPr>
+              <a:t>        cli/</a:t>
+            </a:r>
+          </a:p>
+          <a:p>
+            <a:pPr algn="l"/>
+            <a:r>
+              <a:rPr lang="en-US" sz="1400" dirty="0">
+                <a:solidFill>
+                  <a:srgbClr val="1F2937"/>
+                </a:solidFill>
+                <a:latin typeface="Consolas"/>
+                <a:cs typeface="Consolas"/>
+              </a:rPr>
+              <a:t>        "README file.md" ## quick start</a:t>
+            </a:r>
+          </a:p>
+          <a:p>
+            <a:pPr algn="l"/>
+            <a:r>
+              <a:rPr lang="en-US" sz="1400" dirty="0">
+                <a:solidFill>
+                  <a:srgbClr val="1F2937"/>
+                </a:solidFill>
+                <a:latin typeface="Consolas"/>
+                <a:cs typeface="Consolas"/>
+              </a:rPr>
+              <a:t>    docs/</a:t>
+            </a:r>
+          </a:p>
+          <a:p>
+            <a:pPr algn="l"/>
+            <a:r>
+              <a:rPr lang="en-US" sz="1400" dirty="0">
+                <a:solidFill>
+                  <a:srgbClr val="1F2937"/>
+                </a:solidFill>
+                <a:latin typeface="Consolas"/>
+                <a:cs typeface="Consolas"/>
+              </a:rPr>
+              <a:t>        specs/</a:t>
             </a:r>
           </a:p>
         </p:txBody>
